--- a/Smartphone et tablette/Maitriser_Smartphone_1.pptx
+++ b/Smartphone et tablette/Maitriser_Smartphone_1.pptx
@@ -5004,6 +5004,46 @@
           </a:prstGeom>
         </p:spPr>
       </p:pic>
+      <p:sp>
+        <p:nvSpPr>
+          <p:cNvPr id="61" name="ZoneTexte 60">
+            <a:extLst>
+              <a:ext uri="{FF2B5EF4-FFF2-40B4-BE49-F238E27FC236}">
+                <a16:creationId xmlns:a16="http://schemas.microsoft.com/office/drawing/2014/main" id="{D2EE22FC-7FD7-9ADD-6D38-BF53D2FD22AA}"/>
+              </a:ext>
+            </a:extLst>
+          </p:cNvPr>
+          <p:cNvSpPr txBox="1"/>
+          <p:nvPr/>
+        </p:nvSpPr>
+        <p:spPr>
+          <a:xfrm>
+            <a:off x="0" y="4864100"/>
+            <a:ext cx="9144000" cy="230832"/>
+          </a:xfrm>
+          <a:prstGeom prst="rect">
+            <a:avLst/>
+          </a:prstGeom>
+          <a:noFill/>
+        </p:spPr>
+        <p:txBody>
+          <a:bodyPr vert="horz" rtlCol="0">
+            <a:spAutoFit/>
+          </a:bodyPr>
+          <a:lstStyle/>
+          <a:p>
+            <a:pPr algn="ctr"/>
+            <a:r>
+              <a:rPr lang="fr-FR" sz="900">
+                <a:solidFill>
+                  <a:srgbClr val="B4B4B4"/>
+                </a:solidFill>
+              </a:rPr>
+              <a:t>(c) titi_23 - mediateur-numerique.github.io - Reproduction interdite sans autorisation</a:t>
+            </a:r>
+          </a:p>
+        </p:txBody>
+      </p:sp>
     </p:spTree>
   </p:cSld>
   <p:clrMapOvr>
@@ -6430,6 +6470,46 @@
           </a:prstGeom>
         </p:spPr>
       </p:pic>
+      <p:sp>
+        <p:nvSpPr>
+          <p:cNvPr id="38" name="ZoneTexte 37">
+            <a:extLst>
+              <a:ext uri="{FF2B5EF4-FFF2-40B4-BE49-F238E27FC236}">
+                <a16:creationId xmlns:a16="http://schemas.microsoft.com/office/drawing/2014/main" id="{62B800E0-8BB8-81A7-1258-9D7EF42097E8}"/>
+              </a:ext>
+            </a:extLst>
+          </p:cNvPr>
+          <p:cNvSpPr txBox="1"/>
+          <p:nvPr/>
+        </p:nvSpPr>
+        <p:spPr>
+          <a:xfrm>
+            <a:off x="0" y="4864100"/>
+            <a:ext cx="9144000" cy="230832"/>
+          </a:xfrm>
+          <a:prstGeom prst="rect">
+            <a:avLst/>
+          </a:prstGeom>
+          <a:noFill/>
+        </p:spPr>
+        <p:txBody>
+          <a:bodyPr vert="horz" rtlCol="0">
+            <a:spAutoFit/>
+          </a:bodyPr>
+          <a:lstStyle/>
+          <a:p>
+            <a:pPr algn="ctr"/>
+            <a:r>
+              <a:rPr lang="fr-FR" sz="900">
+                <a:solidFill>
+                  <a:srgbClr val="B4B4B4"/>
+                </a:solidFill>
+              </a:rPr>
+              <a:t>(c) titi_23 - mediateur-numerique.github.io - Reproduction interdite sans autorisation</a:t>
+            </a:r>
+          </a:p>
+        </p:txBody>
+      </p:sp>
     </p:spTree>
   </p:cSld>
   <p:clrMapOvr>
@@ -7856,6 +7936,46 @@
           </a:prstGeom>
         </p:spPr>
       </p:pic>
+      <p:sp>
+        <p:nvSpPr>
+          <p:cNvPr id="38" name="ZoneTexte 37">
+            <a:extLst>
+              <a:ext uri="{FF2B5EF4-FFF2-40B4-BE49-F238E27FC236}">
+                <a16:creationId xmlns:a16="http://schemas.microsoft.com/office/drawing/2014/main" id="{97AB3681-2734-7660-0D3B-2BD4EE3088FE}"/>
+              </a:ext>
+            </a:extLst>
+          </p:cNvPr>
+          <p:cNvSpPr txBox="1"/>
+          <p:nvPr/>
+        </p:nvSpPr>
+        <p:spPr>
+          <a:xfrm>
+            <a:off x="0" y="4864100"/>
+            <a:ext cx="9144000" cy="230832"/>
+          </a:xfrm>
+          <a:prstGeom prst="rect">
+            <a:avLst/>
+          </a:prstGeom>
+          <a:noFill/>
+        </p:spPr>
+        <p:txBody>
+          <a:bodyPr vert="horz" rtlCol="0">
+            <a:spAutoFit/>
+          </a:bodyPr>
+          <a:lstStyle/>
+          <a:p>
+            <a:pPr algn="ctr"/>
+            <a:r>
+              <a:rPr lang="fr-FR" sz="900">
+                <a:solidFill>
+                  <a:srgbClr val="B4B4B4"/>
+                </a:solidFill>
+              </a:rPr>
+              <a:t>(c) titi_23 - mediateur-numerique.github.io - Reproduction interdite sans autorisation</a:t>
+            </a:r>
+          </a:p>
+        </p:txBody>
+      </p:sp>
     </p:spTree>
   </p:cSld>
   <p:clrMapOvr>
@@ -9282,6 +9402,46 @@
           </a:prstGeom>
         </p:spPr>
       </p:pic>
+      <p:sp>
+        <p:nvSpPr>
+          <p:cNvPr id="38" name="ZoneTexte 37">
+            <a:extLst>
+              <a:ext uri="{FF2B5EF4-FFF2-40B4-BE49-F238E27FC236}">
+                <a16:creationId xmlns:a16="http://schemas.microsoft.com/office/drawing/2014/main" id="{CEB673A5-3716-82BC-B213-71BD269BBB3E}"/>
+              </a:ext>
+            </a:extLst>
+          </p:cNvPr>
+          <p:cNvSpPr txBox="1"/>
+          <p:nvPr/>
+        </p:nvSpPr>
+        <p:spPr>
+          <a:xfrm>
+            <a:off x="0" y="4864100"/>
+            <a:ext cx="9144000" cy="230832"/>
+          </a:xfrm>
+          <a:prstGeom prst="rect">
+            <a:avLst/>
+          </a:prstGeom>
+          <a:noFill/>
+        </p:spPr>
+        <p:txBody>
+          <a:bodyPr vert="horz" rtlCol="0">
+            <a:spAutoFit/>
+          </a:bodyPr>
+          <a:lstStyle/>
+          <a:p>
+            <a:pPr algn="ctr"/>
+            <a:r>
+              <a:rPr lang="fr-FR" sz="900">
+                <a:solidFill>
+                  <a:srgbClr val="B4B4B4"/>
+                </a:solidFill>
+              </a:rPr>
+              <a:t>(c) titi_23 - mediateur-numerique.github.io - Reproduction interdite sans autorisation</a:t>
+            </a:r>
+          </a:p>
+        </p:txBody>
+      </p:sp>
     </p:spTree>
   </p:cSld>
   <p:clrMapOvr>
@@ -10708,6 +10868,46 @@
           </a:prstGeom>
         </p:spPr>
       </p:pic>
+      <p:sp>
+        <p:nvSpPr>
+          <p:cNvPr id="38" name="ZoneTexte 37">
+            <a:extLst>
+              <a:ext uri="{FF2B5EF4-FFF2-40B4-BE49-F238E27FC236}">
+                <a16:creationId xmlns:a16="http://schemas.microsoft.com/office/drawing/2014/main" id="{B37E01E8-6655-ED2B-9B22-FF3DFD3C9A9E}"/>
+              </a:ext>
+            </a:extLst>
+          </p:cNvPr>
+          <p:cNvSpPr txBox="1"/>
+          <p:nvPr/>
+        </p:nvSpPr>
+        <p:spPr>
+          <a:xfrm>
+            <a:off x="0" y="4864100"/>
+            <a:ext cx="9144000" cy="230832"/>
+          </a:xfrm>
+          <a:prstGeom prst="rect">
+            <a:avLst/>
+          </a:prstGeom>
+          <a:noFill/>
+        </p:spPr>
+        <p:txBody>
+          <a:bodyPr vert="horz" rtlCol="0">
+            <a:spAutoFit/>
+          </a:bodyPr>
+          <a:lstStyle/>
+          <a:p>
+            <a:pPr algn="ctr"/>
+            <a:r>
+              <a:rPr lang="fr-FR" sz="900">
+                <a:solidFill>
+                  <a:srgbClr val="B4B4B4"/>
+                </a:solidFill>
+              </a:rPr>
+              <a:t>(c) titi_23 - mediateur-numerique.github.io - Reproduction interdite sans autorisation</a:t>
+            </a:r>
+          </a:p>
+        </p:txBody>
+      </p:sp>
     </p:spTree>
   </p:cSld>
   <p:clrMapOvr>
@@ -12134,6 +12334,46 @@
           </a:prstGeom>
         </p:spPr>
       </p:pic>
+      <p:sp>
+        <p:nvSpPr>
+          <p:cNvPr id="38" name="ZoneTexte 37">
+            <a:extLst>
+              <a:ext uri="{FF2B5EF4-FFF2-40B4-BE49-F238E27FC236}">
+                <a16:creationId xmlns:a16="http://schemas.microsoft.com/office/drawing/2014/main" id="{E06AEC76-B0FB-FE26-8C87-C5F64419EB7F}"/>
+              </a:ext>
+            </a:extLst>
+          </p:cNvPr>
+          <p:cNvSpPr txBox="1"/>
+          <p:nvPr/>
+        </p:nvSpPr>
+        <p:spPr>
+          <a:xfrm>
+            <a:off x="0" y="4864100"/>
+            <a:ext cx="9144000" cy="230832"/>
+          </a:xfrm>
+          <a:prstGeom prst="rect">
+            <a:avLst/>
+          </a:prstGeom>
+          <a:noFill/>
+        </p:spPr>
+        <p:txBody>
+          <a:bodyPr vert="horz" rtlCol="0">
+            <a:spAutoFit/>
+          </a:bodyPr>
+          <a:lstStyle/>
+          <a:p>
+            <a:pPr algn="ctr"/>
+            <a:r>
+              <a:rPr lang="fr-FR" sz="900">
+                <a:solidFill>
+                  <a:srgbClr val="B4B4B4"/>
+                </a:solidFill>
+              </a:rPr>
+              <a:t>(c) titi_23 - mediateur-numerique.github.io - Reproduction interdite sans autorisation</a:t>
+            </a:r>
+          </a:p>
+        </p:txBody>
+      </p:sp>
     </p:spTree>
   </p:cSld>
   <p:clrMapOvr>
@@ -13375,6 +13615,46 @@
           </a:prstGeom>
         </p:spPr>
       </p:pic>
+      <p:sp>
+        <p:nvSpPr>
+          <p:cNvPr id="33" name="ZoneTexte 32">
+            <a:extLst>
+              <a:ext uri="{FF2B5EF4-FFF2-40B4-BE49-F238E27FC236}">
+                <a16:creationId xmlns:a16="http://schemas.microsoft.com/office/drawing/2014/main" id="{923E9C4C-2117-5BEC-382D-44BAE67F6AD9}"/>
+              </a:ext>
+            </a:extLst>
+          </p:cNvPr>
+          <p:cNvSpPr txBox="1"/>
+          <p:nvPr/>
+        </p:nvSpPr>
+        <p:spPr>
+          <a:xfrm>
+            <a:off x="0" y="4864100"/>
+            <a:ext cx="9144000" cy="230832"/>
+          </a:xfrm>
+          <a:prstGeom prst="rect">
+            <a:avLst/>
+          </a:prstGeom>
+          <a:noFill/>
+        </p:spPr>
+        <p:txBody>
+          <a:bodyPr vert="horz" rtlCol="0">
+            <a:spAutoFit/>
+          </a:bodyPr>
+          <a:lstStyle/>
+          <a:p>
+            <a:pPr algn="ctr"/>
+            <a:r>
+              <a:rPr lang="fr-FR" sz="900">
+                <a:solidFill>
+                  <a:srgbClr val="B4B4B4"/>
+                </a:solidFill>
+              </a:rPr>
+              <a:t>(c) titi_23 - mediateur-numerique.github.io - Reproduction interdite sans autorisation</a:t>
+            </a:r>
+          </a:p>
+        </p:txBody>
+      </p:sp>
     </p:spTree>
   </p:cSld>
   <p:clrMapOvr>
@@ -14738,6 +15018,46 @@
           </a:prstGeom>
         </p:spPr>
       </p:pic>
+      <p:sp>
+        <p:nvSpPr>
+          <p:cNvPr id="37" name="ZoneTexte 36">
+            <a:extLst>
+              <a:ext uri="{FF2B5EF4-FFF2-40B4-BE49-F238E27FC236}">
+                <a16:creationId xmlns:a16="http://schemas.microsoft.com/office/drawing/2014/main" id="{04298616-F14B-61CA-4771-1223964320F1}"/>
+              </a:ext>
+            </a:extLst>
+          </p:cNvPr>
+          <p:cNvSpPr txBox="1"/>
+          <p:nvPr/>
+        </p:nvSpPr>
+        <p:spPr>
+          <a:xfrm>
+            <a:off x="0" y="4864100"/>
+            <a:ext cx="9144000" cy="230832"/>
+          </a:xfrm>
+          <a:prstGeom prst="rect">
+            <a:avLst/>
+          </a:prstGeom>
+          <a:noFill/>
+        </p:spPr>
+        <p:txBody>
+          <a:bodyPr vert="horz" rtlCol="0">
+            <a:spAutoFit/>
+          </a:bodyPr>
+          <a:lstStyle/>
+          <a:p>
+            <a:pPr algn="ctr"/>
+            <a:r>
+              <a:rPr lang="fr-FR" sz="900">
+                <a:solidFill>
+                  <a:srgbClr val="B4B4B4"/>
+                </a:solidFill>
+              </a:rPr>
+              <a:t>(c) titi_23 - mediateur-numerique.github.io - Reproduction interdite sans autorisation</a:t>
+            </a:r>
+          </a:p>
+        </p:txBody>
+      </p:sp>
     </p:spTree>
   </p:cSld>
   <p:clrMapOvr>
@@ -15979,6 +16299,46 @@
           </a:prstGeom>
         </p:spPr>
       </p:pic>
+      <p:sp>
+        <p:nvSpPr>
+          <p:cNvPr id="33" name="ZoneTexte 32">
+            <a:extLst>
+              <a:ext uri="{FF2B5EF4-FFF2-40B4-BE49-F238E27FC236}">
+                <a16:creationId xmlns:a16="http://schemas.microsoft.com/office/drawing/2014/main" id="{20A0515F-4DB0-9D53-4390-D859FFF939DD}"/>
+              </a:ext>
+            </a:extLst>
+          </p:cNvPr>
+          <p:cNvSpPr txBox="1"/>
+          <p:nvPr/>
+        </p:nvSpPr>
+        <p:spPr>
+          <a:xfrm>
+            <a:off x="0" y="4864100"/>
+            <a:ext cx="9144000" cy="230832"/>
+          </a:xfrm>
+          <a:prstGeom prst="rect">
+            <a:avLst/>
+          </a:prstGeom>
+          <a:noFill/>
+        </p:spPr>
+        <p:txBody>
+          <a:bodyPr vert="horz" rtlCol="0">
+            <a:spAutoFit/>
+          </a:bodyPr>
+          <a:lstStyle/>
+          <a:p>
+            <a:pPr algn="ctr"/>
+            <a:r>
+              <a:rPr lang="fr-FR" sz="900">
+                <a:solidFill>
+                  <a:srgbClr val="B4B4B4"/>
+                </a:solidFill>
+              </a:rPr>
+              <a:t>(c) titi_23 - mediateur-numerique.github.io - Reproduction interdite sans autorisation</a:t>
+            </a:r>
+          </a:p>
+        </p:txBody>
+      </p:sp>
     </p:spTree>
   </p:cSld>
   <p:clrMapOvr>
@@ -17106,6 +17466,46 @@
           </a:prstGeom>
         </p:spPr>
       </p:pic>
+      <p:sp>
+        <p:nvSpPr>
+          <p:cNvPr id="30" name="ZoneTexte 29">
+            <a:extLst>
+              <a:ext uri="{FF2B5EF4-FFF2-40B4-BE49-F238E27FC236}">
+                <a16:creationId xmlns:a16="http://schemas.microsoft.com/office/drawing/2014/main" id="{03E421D7-00DD-FAAB-6F03-27A53F4BA3C4}"/>
+              </a:ext>
+            </a:extLst>
+          </p:cNvPr>
+          <p:cNvSpPr txBox="1"/>
+          <p:nvPr/>
+        </p:nvSpPr>
+        <p:spPr>
+          <a:xfrm>
+            <a:off x="0" y="4864100"/>
+            <a:ext cx="9144000" cy="230832"/>
+          </a:xfrm>
+          <a:prstGeom prst="rect">
+            <a:avLst/>
+          </a:prstGeom>
+          <a:noFill/>
+        </p:spPr>
+        <p:txBody>
+          <a:bodyPr vert="horz" rtlCol="0">
+            <a:spAutoFit/>
+          </a:bodyPr>
+          <a:lstStyle/>
+          <a:p>
+            <a:pPr algn="ctr"/>
+            <a:r>
+              <a:rPr lang="fr-FR" sz="900">
+                <a:solidFill>
+                  <a:srgbClr val="B4B4B4"/>
+                </a:solidFill>
+              </a:rPr>
+              <a:t>(c) titi_23 - mediateur-numerique.github.io - Reproduction interdite sans autorisation</a:t>
+            </a:r>
+          </a:p>
+        </p:txBody>
+      </p:sp>
     </p:spTree>
   </p:cSld>
   <p:clrMapOvr>
@@ -18418,6 +18818,46 @@
           </a:prstGeom>
         </p:spPr>
       </p:pic>
+      <p:sp>
+        <p:nvSpPr>
+          <p:cNvPr id="35" name="ZoneTexte 34">
+            <a:extLst>
+              <a:ext uri="{FF2B5EF4-FFF2-40B4-BE49-F238E27FC236}">
+                <a16:creationId xmlns:a16="http://schemas.microsoft.com/office/drawing/2014/main" id="{AF253DCF-6E2D-3EB8-0CF0-59EAB1CC87E4}"/>
+              </a:ext>
+            </a:extLst>
+          </p:cNvPr>
+          <p:cNvSpPr txBox="1"/>
+          <p:nvPr/>
+        </p:nvSpPr>
+        <p:spPr>
+          <a:xfrm>
+            <a:off x="0" y="4864100"/>
+            <a:ext cx="9144000" cy="230832"/>
+          </a:xfrm>
+          <a:prstGeom prst="rect">
+            <a:avLst/>
+          </a:prstGeom>
+          <a:noFill/>
+        </p:spPr>
+        <p:txBody>
+          <a:bodyPr vert="horz" rtlCol="0">
+            <a:spAutoFit/>
+          </a:bodyPr>
+          <a:lstStyle/>
+          <a:p>
+            <a:pPr algn="ctr"/>
+            <a:r>
+              <a:rPr lang="fr-FR" sz="900">
+                <a:solidFill>
+                  <a:srgbClr val="B4B4B4"/>
+                </a:solidFill>
+              </a:rPr>
+              <a:t>(c) titi_23 - mediateur-numerique.github.io - Reproduction interdite sans autorisation</a:t>
+            </a:r>
+          </a:p>
+        </p:txBody>
+      </p:sp>
     </p:spTree>
   </p:cSld>
   <p:clrMapOvr>
@@ -21542,6 +21982,46 @@
           </a:prstGeom>
         </p:spPr>
       </p:pic>
+      <p:sp>
+        <p:nvSpPr>
+          <p:cNvPr id="5" name="ZoneTexte 4">
+            <a:extLst>
+              <a:ext uri="{FF2B5EF4-FFF2-40B4-BE49-F238E27FC236}">
+                <a16:creationId xmlns:a16="http://schemas.microsoft.com/office/drawing/2014/main" id="{676079D1-C885-447D-9BD2-552E6F6E0194}"/>
+              </a:ext>
+            </a:extLst>
+          </p:cNvPr>
+          <p:cNvSpPr txBox="1"/>
+          <p:nvPr/>
+        </p:nvSpPr>
+        <p:spPr>
+          <a:xfrm>
+            <a:off x="0" y="4864100"/>
+            <a:ext cx="9144000" cy="230832"/>
+          </a:xfrm>
+          <a:prstGeom prst="rect">
+            <a:avLst/>
+          </a:prstGeom>
+          <a:noFill/>
+        </p:spPr>
+        <p:txBody>
+          <a:bodyPr vert="horz" rtlCol="0">
+            <a:spAutoFit/>
+          </a:bodyPr>
+          <a:lstStyle/>
+          <a:p>
+            <a:pPr algn="ctr"/>
+            <a:r>
+              <a:rPr lang="fr-FR" sz="900">
+                <a:solidFill>
+                  <a:srgbClr val="B4B4B4"/>
+                </a:solidFill>
+              </a:rPr>
+              <a:t>(c) titi_23 - mediateur-numerique.github.io - Reproduction interdite sans autorisation</a:t>
+            </a:r>
+          </a:p>
+        </p:txBody>
+      </p:sp>
     </p:spTree>
   </p:cSld>
   <p:clrMapOvr>
@@ -22783,6 +23263,46 @@
           </a:prstGeom>
         </p:spPr>
       </p:pic>
+      <p:sp>
+        <p:nvSpPr>
+          <p:cNvPr id="33" name="ZoneTexte 32">
+            <a:extLst>
+              <a:ext uri="{FF2B5EF4-FFF2-40B4-BE49-F238E27FC236}">
+                <a16:creationId xmlns:a16="http://schemas.microsoft.com/office/drawing/2014/main" id="{6F35A8BB-021D-1B4B-63FB-3823F2629230}"/>
+              </a:ext>
+            </a:extLst>
+          </p:cNvPr>
+          <p:cNvSpPr txBox="1"/>
+          <p:nvPr/>
+        </p:nvSpPr>
+        <p:spPr>
+          <a:xfrm>
+            <a:off x="0" y="4864100"/>
+            <a:ext cx="9144000" cy="230832"/>
+          </a:xfrm>
+          <a:prstGeom prst="rect">
+            <a:avLst/>
+          </a:prstGeom>
+          <a:noFill/>
+        </p:spPr>
+        <p:txBody>
+          <a:bodyPr vert="horz" rtlCol="0">
+            <a:spAutoFit/>
+          </a:bodyPr>
+          <a:lstStyle/>
+          <a:p>
+            <a:pPr algn="ctr"/>
+            <a:r>
+              <a:rPr lang="fr-FR" sz="900">
+                <a:solidFill>
+                  <a:srgbClr val="B4B4B4"/>
+                </a:solidFill>
+              </a:rPr>
+              <a:t>(c) titi_23 - mediateur-numerique.github.io - Reproduction interdite sans autorisation</a:t>
+            </a:r>
+          </a:p>
+        </p:txBody>
+      </p:sp>
     </p:spTree>
   </p:cSld>
   <p:clrMapOvr>
@@ -23952,6 +24472,46 @@
           </a:prstGeom>
         </p:spPr>
       </p:pic>
+      <p:sp>
+        <p:nvSpPr>
+          <p:cNvPr id="31" name="ZoneTexte 30">
+            <a:extLst>
+              <a:ext uri="{FF2B5EF4-FFF2-40B4-BE49-F238E27FC236}">
+                <a16:creationId xmlns:a16="http://schemas.microsoft.com/office/drawing/2014/main" id="{43E2DB9B-8F5B-3D09-A3B7-64837A724250}"/>
+              </a:ext>
+            </a:extLst>
+          </p:cNvPr>
+          <p:cNvSpPr txBox="1"/>
+          <p:nvPr/>
+        </p:nvSpPr>
+        <p:spPr>
+          <a:xfrm>
+            <a:off x="0" y="4864100"/>
+            <a:ext cx="9144000" cy="230832"/>
+          </a:xfrm>
+          <a:prstGeom prst="rect">
+            <a:avLst/>
+          </a:prstGeom>
+          <a:noFill/>
+        </p:spPr>
+        <p:txBody>
+          <a:bodyPr vert="horz" rtlCol="0">
+            <a:spAutoFit/>
+          </a:bodyPr>
+          <a:lstStyle/>
+          <a:p>
+            <a:pPr algn="ctr"/>
+            <a:r>
+              <a:rPr lang="fr-FR" sz="900">
+                <a:solidFill>
+                  <a:srgbClr val="B4B4B4"/>
+                </a:solidFill>
+              </a:rPr>
+              <a:t>(c) titi_23 - mediateur-numerique.github.io - Reproduction interdite sans autorisation</a:t>
+            </a:r>
+          </a:p>
+        </p:txBody>
+      </p:sp>
     </p:spTree>
   </p:cSld>
   <p:clrMapOvr>
@@ -25378,6 +25938,46 @@
           </a:prstGeom>
         </p:spPr>
       </p:pic>
+      <p:sp>
+        <p:nvSpPr>
+          <p:cNvPr id="38" name="ZoneTexte 37">
+            <a:extLst>
+              <a:ext uri="{FF2B5EF4-FFF2-40B4-BE49-F238E27FC236}">
+                <a16:creationId xmlns:a16="http://schemas.microsoft.com/office/drawing/2014/main" id="{EE28AFB9-9179-77C8-8EAD-E1ECFEF4B9A2}"/>
+              </a:ext>
+            </a:extLst>
+          </p:cNvPr>
+          <p:cNvSpPr txBox="1"/>
+          <p:nvPr/>
+        </p:nvSpPr>
+        <p:spPr>
+          <a:xfrm>
+            <a:off x="0" y="4864100"/>
+            <a:ext cx="9144000" cy="230832"/>
+          </a:xfrm>
+          <a:prstGeom prst="rect">
+            <a:avLst/>
+          </a:prstGeom>
+          <a:noFill/>
+        </p:spPr>
+        <p:txBody>
+          <a:bodyPr vert="horz" rtlCol="0">
+            <a:spAutoFit/>
+          </a:bodyPr>
+          <a:lstStyle/>
+          <a:p>
+            <a:pPr algn="ctr"/>
+            <a:r>
+              <a:rPr lang="fr-FR" sz="900">
+                <a:solidFill>
+                  <a:srgbClr val="B4B4B4"/>
+                </a:solidFill>
+              </a:rPr>
+              <a:t>(c) titi_23 - mediateur-numerique.github.io - Reproduction interdite sans autorisation</a:t>
+            </a:r>
+          </a:p>
+        </p:txBody>
+      </p:sp>
     </p:spTree>
   </p:cSld>
   <p:clrMapOvr>
@@ -27170,6 +27770,46 @@
           </a:prstGeom>
         </p:spPr>
       </p:pic>
+      <p:sp>
+        <p:nvSpPr>
+          <p:cNvPr id="16" name="ZoneTexte 15">
+            <a:extLst>
+              <a:ext uri="{FF2B5EF4-FFF2-40B4-BE49-F238E27FC236}">
+                <a16:creationId xmlns:a16="http://schemas.microsoft.com/office/drawing/2014/main" id="{4D3C60FD-2D9B-2718-CAC1-A0BF7CA5B551}"/>
+              </a:ext>
+            </a:extLst>
+          </p:cNvPr>
+          <p:cNvSpPr txBox="1"/>
+          <p:nvPr/>
+        </p:nvSpPr>
+        <p:spPr>
+          <a:xfrm>
+            <a:off x="0" y="4864100"/>
+            <a:ext cx="9144000" cy="230832"/>
+          </a:xfrm>
+          <a:prstGeom prst="rect">
+            <a:avLst/>
+          </a:prstGeom>
+          <a:noFill/>
+        </p:spPr>
+        <p:txBody>
+          <a:bodyPr vert="horz" rtlCol="0">
+            <a:spAutoFit/>
+          </a:bodyPr>
+          <a:lstStyle/>
+          <a:p>
+            <a:pPr algn="ctr"/>
+            <a:r>
+              <a:rPr lang="fr-FR" sz="900">
+                <a:solidFill>
+                  <a:srgbClr val="B4B4B4"/>
+                </a:solidFill>
+              </a:rPr>
+              <a:t>(c) titi_23 - mediateur-numerique.github.io - Reproduction interdite sans autorisation</a:t>
+            </a:r>
+          </a:p>
+        </p:txBody>
+      </p:sp>
     </p:spTree>
   </p:cSld>
   <p:clrMapOvr>
@@ -28114,6 +28754,46 @@
           </a:prstGeom>
         </p:spPr>
       </p:pic>
+      <p:sp>
+        <p:nvSpPr>
+          <p:cNvPr id="25" name="ZoneTexte 24">
+            <a:extLst>
+              <a:ext uri="{FF2B5EF4-FFF2-40B4-BE49-F238E27FC236}">
+                <a16:creationId xmlns:a16="http://schemas.microsoft.com/office/drawing/2014/main" id="{17C14384-4312-A52B-8576-B0E263C9E8A9}"/>
+              </a:ext>
+            </a:extLst>
+          </p:cNvPr>
+          <p:cNvSpPr txBox="1"/>
+          <p:nvPr/>
+        </p:nvSpPr>
+        <p:spPr>
+          <a:xfrm>
+            <a:off x="0" y="4864100"/>
+            <a:ext cx="9144000" cy="230832"/>
+          </a:xfrm>
+          <a:prstGeom prst="rect">
+            <a:avLst/>
+          </a:prstGeom>
+          <a:noFill/>
+        </p:spPr>
+        <p:txBody>
+          <a:bodyPr vert="horz" rtlCol="0">
+            <a:spAutoFit/>
+          </a:bodyPr>
+          <a:lstStyle/>
+          <a:p>
+            <a:pPr algn="ctr"/>
+            <a:r>
+              <a:rPr lang="fr-FR" sz="900">
+                <a:solidFill>
+                  <a:srgbClr val="B4B4B4"/>
+                </a:solidFill>
+              </a:rPr>
+              <a:t>(c) titi_23 - mediateur-numerique.github.io - Reproduction interdite sans autorisation</a:t>
+            </a:r>
+          </a:p>
+        </p:txBody>
+      </p:sp>
     </p:spTree>
   </p:cSld>
   <p:clrMapOvr>
@@ -29390,6 +30070,46 @@
           </a:prstGeom>
         </p:spPr>
       </p:pic>
+      <p:sp>
+        <p:nvSpPr>
+          <p:cNvPr id="34" name="ZoneTexte 33">
+            <a:extLst>
+              <a:ext uri="{FF2B5EF4-FFF2-40B4-BE49-F238E27FC236}">
+                <a16:creationId xmlns:a16="http://schemas.microsoft.com/office/drawing/2014/main" id="{602AFD68-3CD8-E05E-F36D-848B421FCFD0}"/>
+              </a:ext>
+            </a:extLst>
+          </p:cNvPr>
+          <p:cNvSpPr txBox="1"/>
+          <p:nvPr/>
+        </p:nvSpPr>
+        <p:spPr>
+          <a:xfrm>
+            <a:off x="0" y="4864100"/>
+            <a:ext cx="9144000" cy="230832"/>
+          </a:xfrm>
+          <a:prstGeom prst="rect">
+            <a:avLst/>
+          </a:prstGeom>
+          <a:noFill/>
+        </p:spPr>
+        <p:txBody>
+          <a:bodyPr vert="horz" rtlCol="0">
+            <a:spAutoFit/>
+          </a:bodyPr>
+          <a:lstStyle/>
+          <a:p>
+            <a:pPr algn="ctr"/>
+            <a:r>
+              <a:rPr lang="fr-FR" sz="900">
+                <a:solidFill>
+                  <a:srgbClr val="B4B4B4"/>
+                </a:solidFill>
+              </a:rPr>
+              <a:t>(c) titi_23 - mediateur-numerique.github.io - Reproduction interdite sans autorisation</a:t>
+            </a:r>
+          </a:p>
+        </p:txBody>
+      </p:sp>
     </p:spTree>
   </p:cSld>
   <p:clrMapOvr>
@@ -30877,6 +31597,46 @@
           </a:prstGeom>
         </p:spPr>
       </p:pic>
+      <p:sp>
+        <p:nvSpPr>
+          <p:cNvPr id="40" name="ZoneTexte 39">
+            <a:extLst>
+              <a:ext uri="{FF2B5EF4-FFF2-40B4-BE49-F238E27FC236}">
+                <a16:creationId xmlns:a16="http://schemas.microsoft.com/office/drawing/2014/main" id="{A677DF5A-6031-E2A4-7AE4-D76FD9322EDB}"/>
+              </a:ext>
+            </a:extLst>
+          </p:cNvPr>
+          <p:cNvSpPr txBox="1"/>
+          <p:nvPr/>
+        </p:nvSpPr>
+        <p:spPr>
+          <a:xfrm>
+            <a:off x="0" y="4864100"/>
+            <a:ext cx="9144000" cy="230832"/>
+          </a:xfrm>
+          <a:prstGeom prst="rect">
+            <a:avLst/>
+          </a:prstGeom>
+          <a:noFill/>
+        </p:spPr>
+        <p:txBody>
+          <a:bodyPr vert="horz" rtlCol="0">
+            <a:spAutoFit/>
+          </a:bodyPr>
+          <a:lstStyle/>
+          <a:p>
+            <a:pPr algn="ctr"/>
+            <a:r>
+              <a:rPr lang="fr-FR" sz="900">
+                <a:solidFill>
+                  <a:srgbClr val="B4B4B4"/>
+                </a:solidFill>
+              </a:rPr>
+              <a:t>(c) titi_23 - mediateur-numerique.github.io - Reproduction interdite sans autorisation</a:t>
+            </a:r>
+          </a:p>
+        </p:txBody>
+      </p:sp>
     </p:spTree>
   </p:cSld>
   <p:clrMapOvr>
@@ -32929,6 +33689,46 @@
           </a:prstGeom>
         </p:spPr>
       </p:pic>
+      <p:sp>
+        <p:nvSpPr>
+          <p:cNvPr id="56" name="ZoneTexte 55">
+            <a:extLst>
+              <a:ext uri="{FF2B5EF4-FFF2-40B4-BE49-F238E27FC236}">
+                <a16:creationId xmlns:a16="http://schemas.microsoft.com/office/drawing/2014/main" id="{B3330BF0-6892-DE65-420D-A42AE89E516C}"/>
+              </a:ext>
+            </a:extLst>
+          </p:cNvPr>
+          <p:cNvSpPr txBox="1"/>
+          <p:nvPr/>
+        </p:nvSpPr>
+        <p:spPr>
+          <a:xfrm>
+            <a:off x="0" y="4864100"/>
+            <a:ext cx="9144000" cy="230832"/>
+          </a:xfrm>
+          <a:prstGeom prst="rect">
+            <a:avLst/>
+          </a:prstGeom>
+          <a:noFill/>
+        </p:spPr>
+        <p:txBody>
+          <a:bodyPr vert="horz" rtlCol="0">
+            <a:spAutoFit/>
+          </a:bodyPr>
+          <a:lstStyle/>
+          <a:p>
+            <a:pPr algn="ctr"/>
+            <a:r>
+              <a:rPr lang="fr-FR" sz="900">
+                <a:solidFill>
+                  <a:srgbClr val="B4B4B4"/>
+                </a:solidFill>
+              </a:rPr>
+              <a:t>(c) titi_23 - mediateur-numerique.github.io - Reproduction interdite sans autorisation</a:t>
+            </a:r>
+          </a:p>
+        </p:txBody>
+      </p:sp>
     </p:spTree>
   </p:cSld>
   <p:clrMapOvr>
@@ -34928,6 +35728,46 @@
           </a:prstGeom>
         </p:spPr>
       </p:pic>
+      <p:sp>
+        <p:nvSpPr>
+          <p:cNvPr id="55" name="ZoneTexte 54">
+            <a:extLst>
+              <a:ext uri="{FF2B5EF4-FFF2-40B4-BE49-F238E27FC236}">
+                <a16:creationId xmlns:a16="http://schemas.microsoft.com/office/drawing/2014/main" id="{0B9490F7-9D90-DB49-54E2-B6ACEE220F69}"/>
+              </a:ext>
+            </a:extLst>
+          </p:cNvPr>
+          <p:cNvSpPr txBox="1"/>
+          <p:nvPr/>
+        </p:nvSpPr>
+        <p:spPr>
+          <a:xfrm>
+            <a:off x="0" y="4864100"/>
+            <a:ext cx="9144000" cy="230832"/>
+          </a:xfrm>
+          <a:prstGeom prst="rect">
+            <a:avLst/>
+          </a:prstGeom>
+          <a:noFill/>
+        </p:spPr>
+        <p:txBody>
+          <a:bodyPr vert="horz" rtlCol="0">
+            <a:spAutoFit/>
+          </a:bodyPr>
+          <a:lstStyle/>
+          <a:p>
+            <a:pPr algn="ctr"/>
+            <a:r>
+              <a:rPr lang="fr-FR" sz="900">
+                <a:solidFill>
+                  <a:srgbClr val="B4B4B4"/>
+                </a:solidFill>
+              </a:rPr>
+              <a:t>(c) titi_23 - mediateur-numerique.github.io - Reproduction interdite sans autorisation</a:t>
+            </a:r>
+          </a:p>
+        </p:txBody>
+      </p:sp>
     </p:spTree>
   </p:cSld>
   <p:clrMapOvr>
@@ -36592,6 +37432,46 @@
           </a:prstGeom>
         </p:spPr>
       </p:pic>
+      <p:sp>
+        <p:nvSpPr>
+          <p:cNvPr id="10" name="ZoneTexte 9">
+            <a:extLst>
+              <a:ext uri="{FF2B5EF4-FFF2-40B4-BE49-F238E27FC236}">
+                <a16:creationId xmlns:a16="http://schemas.microsoft.com/office/drawing/2014/main" id="{9CDC0819-B739-564C-654C-F996CEDEC316}"/>
+              </a:ext>
+            </a:extLst>
+          </p:cNvPr>
+          <p:cNvSpPr txBox="1"/>
+          <p:nvPr/>
+        </p:nvSpPr>
+        <p:spPr>
+          <a:xfrm>
+            <a:off x="0" y="4864100"/>
+            <a:ext cx="9144000" cy="230832"/>
+          </a:xfrm>
+          <a:prstGeom prst="rect">
+            <a:avLst/>
+          </a:prstGeom>
+          <a:noFill/>
+        </p:spPr>
+        <p:txBody>
+          <a:bodyPr vert="horz" rtlCol="0">
+            <a:spAutoFit/>
+          </a:bodyPr>
+          <a:lstStyle/>
+          <a:p>
+            <a:pPr algn="ctr"/>
+            <a:r>
+              <a:rPr lang="fr-FR" sz="900">
+                <a:solidFill>
+                  <a:srgbClr val="B4B4B4"/>
+                </a:solidFill>
+              </a:rPr>
+              <a:t>(c) titi_23 - mediateur-numerique.github.io - Reproduction interdite sans autorisation</a:t>
+            </a:r>
+          </a:p>
+        </p:txBody>
+      </p:sp>
     </p:spTree>
   </p:cSld>
   <p:clrMapOvr>
@@ -38238,6 +39118,46 @@
           </a:prstGeom>
         </p:spPr>
       </p:pic>
+      <p:sp>
+        <p:nvSpPr>
+          <p:cNvPr id="45" name="ZoneTexte 44">
+            <a:extLst>
+              <a:ext uri="{FF2B5EF4-FFF2-40B4-BE49-F238E27FC236}">
+                <a16:creationId xmlns:a16="http://schemas.microsoft.com/office/drawing/2014/main" id="{C5E094D6-4278-97B1-F474-F6367C4D0D6B}"/>
+              </a:ext>
+            </a:extLst>
+          </p:cNvPr>
+          <p:cNvSpPr txBox="1"/>
+          <p:nvPr/>
+        </p:nvSpPr>
+        <p:spPr>
+          <a:xfrm>
+            <a:off x="0" y="4864100"/>
+            <a:ext cx="9144000" cy="230832"/>
+          </a:xfrm>
+          <a:prstGeom prst="rect">
+            <a:avLst/>
+          </a:prstGeom>
+          <a:noFill/>
+        </p:spPr>
+        <p:txBody>
+          <a:bodyPr vert="horz" rtlCol="0">
+            <a:spAutoFit/>
+          </a:bodyPr>
+          <a:lstStyle/>
+          <a:p>
+            <a:pPr algn="ctr"/>
+            <a:r>
+              <a:rPr lang="fr-FR" sz="900">
+                <a:solidFill>
+                  <a:srgbClr val="B4B4B4"/>
+                </a:solidFill>
+              </a:rPr>
+              <a:t>(c) titi_23 - mediateur-numerique.github.io - Reproduction interdite sans autorisation</a:t>
+            </a:r>
+          </a:p>
+        </p:txBody>
+      </p:sp>
     </p:spTree>
   </p:cSld>
   <p:clrMapOvr>
@@ -41084,6 +42004,46 @@
           </a:prstGeom>
         </p:spPr>
       </p:pic>
+      <p:sp>
+        <p:nvSpPr>
+          <p:cNvPr id="896" name="ZoneTexte 895">
+            <a:extLst>
+              <a:ext uri="{FF2B5EF4-FFF2-40B4-BE49-F238E27FC236}">
+                <a16:creationId xmlns:a16="http://schemas.microsoft.com/office/drawing/2014/main" id="{BC7BA0C6-202B-07C7-A875-ABA0909E430A}"/>
+              </a:ext>
+            </a:extLst>
+          </p:cNvPr>
+          <p:cNvSpPr txBox="1"/>
+          <p:nvPr/>
+        </p:nvSpPr>
+        <p:spPr>
+          <a:xfrm>
+            <a:off x="0" y="4864100"/>
+            <a:ext cx="9144000" cy="230832"/>
+          </a:xfrm>
+          <a:prstGeom prst="rect">
+            <a:avLst/>
+          </a:prstGeom>
+          <a:noFill/>
+        </p:spPr>
+        <p:txBody>
+          <a:bodyPr vert="horz" rtlCol="0">
+            <a:spAutoFit/>
+          </a:bodyPr>
+          <a:lstStyle/>
+          <a:p>
+            <a:pPr algn="ctr"/>
+            <a:r>
+              <a:rPr lang="fr-FR" sz="900">
+                <a:solidFill>
+                  <a:srgbClr val="B4B4B4"/>
+                </a:solidFill>
+              </a:rPr>
+              <a:t>(c) titi_23 - mediateur-numerique.github.io - Reproduction interdite sans autorisation</a:t>
+            </a:r>
+          </a:p>
+        </p:txBody>
+      </p:sp>
     </p:spTree>
   </p:cSld>
   <p:clrMapOvr>
@@ -42798,6 +43758,46 @@
           </a:prstGeom>
         </p:spPr>
       </p:pic>
+      <p:sp>
+        <p:nvSpPr>
+          <p:cNvPr id="46" name="ZoneTexte 45">
+            <a:extLst>
+              <a:ext uri="{FF2B5EF4-FFF2-40B4-BE49-F238E27FC236}">
+                <a16:creationId xmlns:a16="http://schemas.microsoft.com/office/drawing/2014/main" id="{56C7C02D-82B6-F927-BFD9-B95C9B3D14AE}"/>
+              </a:ext>
+            </a:extLst>
+          </p:cNvPr>
+          <p:cNvSpPr txBox="1"/>
+          <p:nvPr/>
+        </p:nvSpPr>
+        <p:spPr>
+          <a:xfrm>
+            <a:off x="0" y="4864100"/>
+            <a:ext cx="9144000" cy="230832"/>
+          </a:xfrm>
+          <a:prstGeom prst="rect">
+            <a:avLst/>
+          </a:prstGeom>
+          <a:noFill/>
+        </p:spPr>
+        <p:txBody>
+          <a:bodyPr vert="horz" rtlCol="0">
+            <a:spAutoFit/>
+          </a:bodyPr>
+          <a:lstStyle/>
+          <a:p>
+            <a:pPr algn="ctr"/>
+            <a:r>
+              <a:rPr lang="fr-FR" sz="900">
+                <a:solidFill>
+                  <a:srgbClr val="B4B4B4"/>
+                </a:solidFill>
+              </a:rPr>
+              <a:t>(c) titi_23 - mediateur-numerique.github.io - Reproduction interdite sans autorisation</a:t>
+            </a:r>
+          </a:p>
+        </p:txBody>
+      </p:sp>
     </p:spTree>
   </p:cSld>
   <p:clrMapOvr>
@@ -44224,6 +45224,46 @@
           </a:prstGeom>
         </p:spPr>
       </p:pic>
+      <p:sp>
+        <p:nvSpPr>
+          <p:cNvPr id="38" name="ZoneTexte 37">
+            <a:extLst>
+              <a:ext uri="{FF2B5EF4-FFF2-40B4-BE49-F238E27FC236}">
+                <a16:creationId xmlns:a16="http://schemas.microsoft.com/office/drawing/2014/main" id="{E93F9396-25EB-34CA-C998-6608DE33A913}"/>
+              </a:ext>
+            </a:extLst>
+          </p:cNvPr>
+          <p:cNvSpPr txBox="1"/>
+          <p:nvPr/>
+        </p:nvSpPr>
+        <p:spPr>
+          <a:xfrm>
+            <a:off x="0" y="4864100"/>
+            <a:ext cx="9144000" cy="230832"/>
+          </a:xfrm>
+          <a:prstGeom prst="rect">
+            <a:avLst/>
+          </a:prstGeom>
+          <a:noFill/>
+        </p:spPr>
+        <p:txBody>
+          <a:bodyPr vert="horz" rtlCol="0">
+            <a:spAutoFit/>
+          </a:bodyPr>
+          <a:lstStyle/>
+          <a:p>
+            <a:pPr algn="ctr"/>
+            <a:r>
+              <a:rPr lang="fr-FR" sz="900">
+                <a:solidFill>
+                  <a:srgbClr val="B4B4B4"/>
+                </a:solidFill>
+              </a:rPr>
+              <a:t>(c) titi_23 - mediateur-numerique.github.io - Reproduction interdite sans autorisation</a:t>
+            </a:r>
+          </a:p>
+        </p:txBody>
+      </p:sp>
     </p:spTree>
   </p:cSld>
   <p:clrMapOvr>
@@ -45536,6 +46576,46 @@
           </a:prstGeom>
         </p:spPr>
       </p:pic>
+      <p:sp>
+        <p:nvSpPr>
+          <p:cNvPr id="35" name="ZoneTexte 34">
+            <a:extLst>
+              <a:ext uri="{FF2B5EF4-FFF2-40B4-BE49-F238E27FC236}">
+                <a16:creationId xmlns:a16="http://schemas.microsoft.com/office/drawing/2014/main" id="{F480CB96-B9A3-DB27-33FA-C4E9DC0D472A}"/>
+              </a:ext>
+            </a:extLst>
+          </p:cNvPr>
+          <p:cNvSpPr txBox="1"/>
+          <p:nvPr/>
+        </p:nvSpPr>
+        <p:spPr>
+          <a:xfrm>
+            <a:off x="0" y="4864100"/>
+            <a:ext cx="9144000" cy="230832"/>
+          </a:xfrm>
+          <a:prstGeom prst="rect">
+            <a:avLst/>
+          </a:prstGeom>
+          <a:noFill/>
+        </p:spPr>
+        <p:txBody>
+          <a:bodyPr vert="horz" rtlCol="0">
+            <a:spAutoFit/>
+          </a:bodyPr>
+          <a:lstStyle/>
+          <a:p>
+            <a:pPr algn="ctr"/>
+            <a:r>
+              <a:rPr lang="fr-FR" sz="900">
+                <a:solidFill>
+                  <a:srgbClr val="B4B4B4"/>
+                </a:solidFill>
+              </a:rPr>
+              <a:t>(c) titi_23 - mediateur-numerique.github.io - Reproduction interdite sans autorisation</a:t>
+            </a:r>
+          </a:p>
+        </p:txBody>
+      </p:sp>
     </p:spTree>
   </p:cSld>
   <p:clrMapOvr>
@@ -46834,6 +47914,46 @@
           </a:prstGeom>
         </p:spPr>
       </p:pic>
+      <p:sp>
+        <p:nvSpPr>
+          <p:cNvPr id="35" name="ZoneTexte 34">
+            <a:extLst>
+              <a:ext uri="{FF2B5EF4-FFF2-40B4-BE49-F238E27FC236}">
+                <a16:creationId xmlns:a16="http://schemas.microsoft.com/office/drawing/2014/main" id="{10EF951D-3EBC-310A-F757-984D9C636D92}"/>
+              </a:ext>
+            </a:extLst>
+          </p:cNvPr>
+          <p:cNvSpPr txBox="1"/>
+          <p:nvPr/>
+        </p:nvSpPr>
+        <p:spPr>
+          <a:xfrm>
+            <a:off x="0" y="4864100"/>
+            <a:ext cx="9144000" cy="230832"/>
+          </a:xfrm>
+          <a:prstGeom prst="rect">
+            <a:avLst/>
+          </a:prstGeom>
+          <a:noFill/>
+        </p:spPr>
+        <p:txBody>
+          <a:bodyPr vert="horz" rtlCol="0">
+            <a:spAutoFit/>
+          </a:bodyPr>
+          <a:lstStyle/>
+          <a:p>
+            <a:pPr algn="ctr"/>
+            <a:r>
+              <a:rPr lang="fr-FR" sz="900">
+                <a:solidFill>
+                  <a:srgbClr val="B4B4B4"/>
+                </a:solidFill>
+              </a:rPr>
+              <a:t>(c) titi_23 - mediateur-numerique.github.io - Reproduction interdite sans autorisation</a:t>
+            </a:r>
+          </a:p>
+        </p:txBody>
+      </p:sp>
     </p:spTree>
   </p:cSld>
   <p:clrMapOvr>
